--- a/Lesson20-HumanInTheLoop/Lesson20-HumanInTheLoop.pptx
+++ b/Lesson20-HumanInTheLoop/Lesson20-HumanInTheLoop.pptx
@@ -1215,7 +1215,7 @@
           <a:p>
             <a:r>
               <a:rPr lang="en-US" dirty="0"/>
-              <a:t>Set OPENAI_API_KEY and run the project. The program asks for the topic. Note the prompt really does read top of the announcement; it means topic. It then drafts, prints the draft between divider lines under AI DRAFT PROPOSAL, and stops at HUMAN REVIEW REQUIRED. This slide is trimmed to the key lines: the topic, the feedback and the draft subject lines are illustrative, and your drafts will be full emails worded differently. Type feedback and you'll see Sending feedback to the AI, followed by a revised draft that reflects it. Type APPROVED, in any case, and the program confirms the announcement is ready to send. If you keep rejecting, the fifth rejection ends the run with Maximum revisions reached.</a:t>
+              <a:t>Set OPENAI_API_KEY and run the project. The program asks for the topic of the announcement. It then drafts, prints the draft between divider lines under AI DRAFT PROPOSAL, and stops at HUMAN REVIEW REQUIRED. This slide is trimmed to the key lines: the topic, the feedback and the draft subject lines are illustrative, and your drafts will be full emails worded differently. Type feedback and you'll see Sending feedback to the AI, followed by a revised draft that reflects it. Type APPROVED, in any case, and the program confirms the announcement is ready to send. If you keep rejecting, the fifth rejection ends the run with Maximum revisions reached.</a:t>
             </a:r>
             <a:endParaRPr lang="en-US" dirty="0"/>
           </a:p>
@@ -8751,7 +8751,7 @@
                 <a:ea typeface="Courier New" pitchFamily="34" charset="-122"/>
                 <a:cs typeface="Courier New" pitchFamily="34" charset="-120"/>
               </a:rPr>
-              <a:t>What is the top of the announcement? New office in Austin</a:t>
+              <a:t>What is the topic of the announcement? Austin office</a:t>
             </a:r>
             <a:endParaRPr lang="en-US" sz="1100" dirty="0"/>
           </a:p>
